--- a/lessons/04_state_space/state_space.pptx
+++ b/lessons/04_state_space/state_space.pptx
@@ -211,7 +211,7 @@
           <a:p>
             <a:fld id="{99D4630A-6D3B-4C97-A7DC-509EB0048625}" type="datetimeFigureOut">
               <a:rPr lang="it-CH" smtClean="0"/>
-              <a:t>11.06.26</a:t>
+              <a:t>18.06.26</a:t>
             </a:fld>
             <a:endParaRPr lang="it-CH"/>
           </a:p>
@@ -2064,7 +2064,7 @@
           <a:p>
             <a:fld id="{2A147C38-CC24-4E9D-9FE1-BE5105214113}" type="datetimeFigureOut">
               <a:rPr lang="it-CH" smtClean="0"/>
-              <a:t>11.06.26</a:t>
+              <a:t>18.06.26</a:t>
             </a:fld>
             <a:endParaRPr lang="it-CH"/>
           </a:p>
@@ -2272,7 +2272,7 @@
           <a:p>
             <a:fld id="{2A147C38-CC24-4E9D-9FE1-BE5105214113}" type="datetimeFigureOut">
               <a:rPr lang="it-CH" smtClean="0"/>
-              <a:t>11.06.26</a:t>
+              <a:t>18.06.26</a:t>
             </a:fld>
             <a:endParaRPr lang="it-CH"/>
           </a:p>
@@ -2485,7 +2485,7 @@
           <a:p>
             <a:fld id="{2A147C38-CC24-4E9D-9FE1-BE5105214113}" type="datetimeFigureOut">
               <a:rPr lang="it-CH" smtClean="0"/>
-              <a:t>11.06.26</a:t>
+              <a:t>18.06.26</a:t>
             </a:fld>
             <a:endParaRPr lang="it-CH"/>
           </a:p>
@@ -2816,7 +2816,7 @@
           <a:p>
             <a:fld id="{2A147C38-CC24-4E9D-9FE1-BE5105214113}" type="datetimeFigureOut">
               <a:rPr lang="it-CH" smtClean="0"/>
-              <a:t>11.06.26</a:t>
+              <a:t>18.06.26</a:t>
             </a:fld>
             <a:endParaRPr lang="it-CH"/>
           </a:p>
@@ -3095,7 +3095,7 @@
           <a:p>
             <a:fld id="{2A147C38-CC24-4E9D-9FE1-BE5105214113}" type="datetimeFigureOut">
               <a:rPr lang="it-CH" smtClean="0"/>
-              <a:t>11.06.26</a:t>
+              <a:t>18.06.26</a:t>
             </a:fld>
             <a:endParaRPr lang="it-CH"/>
           </a:p>
@@ -3371,7 +3371,7 @@
           <a:p>
             <a:fld id="{2A147C38-CC24-4E9D-9FE1-BE5105214113}" type="datetimeFigureOut">
               <a:rPr lang="it-CH" smtClean="0"/>
-              <a:t>11.06.26</a:t>
+              <a:t>18.06.26</a:t>
             </a:fld>
             <a:endParaRPr lang="it-CH"/>
           </a:p>
@@ -3789,7 +3789,7 @@
           <a:p>
             <a:fld id="{2A147C38-CC24-4E9D-9FE1-BE5105214113}" type="datetimeFigureOut">
               <a:rPr lang="it-CH" smtClean="0"/>
-              <a:t>11.06.26</a:t>
+              <a:t>18.06.26</a:t>
             </a:fld>
             <a:endParaRPr lang="it-CH"/>
           </a:p>
@@ -3939,7 +3939,7 @@
           <a:p>
             <a:fld id="{2A147C38-CC24-4E9D-9FE1-BE5105214113}" type="datetimeFigureOut">
               <a:rPr lang="it-CH" smtClean="0"/>
-              <a:t>11.06.26</a:t>
+              <a:t>18.06.26</a:t>
             </a:fld>
             <a:endParaRPr lang="it-CH"/>
           </a:p>
@@ -4052,7 +4052,7 @@
           <a:p>
             <a:fld id="{2A147C38-CC24-4E9D-9FE1-BE5105214113}" type="datetimeFigureOut">
               <a:rPr lang="it-CH" smtClean="0"/>
-              <a:t>11.06.26</a:t>
+              <a:t>18.06.26</a:t>
             </a:fld>
             <a:endParaRPr lang="it-CH"/>
           </a:p>
@@ -4368,7 +4368,7 @@
           <a:p>
             <a:fld id="{2A147C38-CC24-4E9D-9FE1-BE5105214113}" type="datetimeFigureOut">
               <a:rPr lang="it-CH" smtClean="0"/>
-              <a:t>11.06.26</a:t>
+              <a:t>18.06.26</a:t>
             </a:fld>
             <a:endParaRPr lang="it-CH"/>
           </a:p>
@@ -4660,7 +4660,7 @@
           <a:p>
             <a:fld id="{2A147C38-CC24-4E9D-9FE1-BE5105214113}" type="datetimeFigureOut">
               <a:rPr lang="it-CH" smtClean="0"/>
-              <a:t>11.06.26</a:t>
+              <a:t>18.06.26</a:t>
             </a:fld>
             <a:endParaRPr lang="it-CH"/>
           </a:p>
@@ -4903,7 +4903,7 @@
           <a:p>
             <a:fld id="{2A147C38-CC24-4E9D-9FE1-BE5105214113}" type="datetimeFigureOut">
               <a:rPr lang="it-CH" smtClean="0"/>
-              <a:t>11.06.26</a:t>
+              <a:t>18.06.26</a:t>
             </a:fld>
             <a:endParaRPr lang="it-CH"/>
           </a:p>
@@ -6758,8 +6758,8 @@
           </a:p>
         </p:txBody>
       </p:sp>
-      <mc:AlternateContent xmlns:mc="http://schemas.openxmlformats.org/markup-compatibility/2006" xmlns:a14="http://schemas.microsoft.com/office/drawing/2010/main">
-        <mc:Choice Requires="a14">
+      <mc:AlternateContent xmlns:mc="http://schemas.openxmlformats.org/markup-compatibility/2006">
+        <mc:Choice xmlns:a14="http://schemas.microsoft.com/office/drawing/2010/main" Requires="a14">
           <p:sp>
             <p:nvSpPr>
               <p:cNvPr id="20" name="TextBox 19">
@@ -6775,7 +6775,7 @@
             <p:spPr>
               <a:xfrm>
                 <a:off x="4361851" y="1996799"/>
-                <a:ext cx="760016" cy="307777"/>
+                <a:ext cx="706091" cy="307777"/>
               </a:xfrm>
               <a:prstGeom prst="rect">
                 <a:avLst/>
@@ -6791,10 +6791,10 @@
                 <a14:m>
                   <m:oMath xmlns:m="http://schemas.openxmlformats.org/officeDocument/2006/math">
                     <m:r>
-                      <a:rPr lang="en-GB" sz="1400" i="1" dirty="0" smtClean="0">
+                      <a:rPr lang="en-US" sz="1400" b="0" i="1" dirty="0" smtClean="0">
                         <a:latin typeface="Cambria Math" panose="02040503050406030204" pitchFamily="18" charset="0"/>
                       </a:rPr>
-                      <m:t>𝑚</m:t>
+                      <m:t>𝐿</m:t>
                     </m:r>
                   </m:oMath>
                 </a14:m>
@@ -6806,7 +6806,7 @@
             </p:txBody>
           </p:sp>
         </mc:Choice>
-        <mc:Fallback xmlns="">
+        <mc:Fallback>
           <p:sp>
             <p:nvSpPr>
               <p:cNvPr id="20" name="TextBox 19">
@@ -6824,7 +6824,7 @@
             <p:spPr>
               <a:xfrm>
                 <a:off x="4361851" y="1996799"/>
-                <a:ext cx="760016" cy="307777"/>
+                <a:ext cx="706091" cy="307777"/>
               </a:xfrm>
               <a:prstGeom prst="rect">
                 <a:avLst/>
@@ -6832,7 +6832,7 @@
               <a:blipFill>
                 <a:blip r:embed="rId6"/>
                 <a:stretch>
-                  <a:fillRect t="-4000" r="-1639" b="-20000"/>
+                  <a:fillRect t="-4000" r="-1786" b="-20000"/>
                 </a:stretch>
               </a:blipFill>
             </p:spPr>
